--- a/packages/creative-context/src/eval/fixtures/launch-system-v2.pptx
+++ b/packages/creative-context/src/eval/fixtures/launch-system-v2.pptx
@@ -198,9 +198,9 @@
 </file>
 
 <file path=ppt/theme/theme1.xml><?xml version="1.0" encoding="utf-8"?>
-<a:theme xmlns:a="http://schemas.openxmlformats.org/drawingml/2006/main" name="Agent Native">
+<a:theme xmlns:a="http://schemas.openxmlformats.org/drawingml/2006/main" name="Agent-Native">
   <a:themeElements>
-    <a:clrScheme name="Agent Native">
+    <a:clrScheme name="Agent-Native">
       <a:dk1>
         <a:srgbClr val="0B0B10"/>
       </a:dk1>
@@ -211,7 +211,7 @@
         <a:srgbClr val="FFFFFF"/>
       </a:lt1>
     </a:clrScheme>
-    <a:fontScheme name="Agent Native">
+    <a:fontScheme name="Agent-Native">
       <a:majorFont>
         <a:latin typeface="Inter"/>
       </a:majorFont>
